--- a/Foundations of Computer Systems II/Coursewares/5-schedule.pptx
+++ b/Foundations of Computer Systems II/Coursewares/5-schedule.pptx
@@ -1616,15 +1616,7 @@
           <a:bodyPr/>
           <a:p>
             <a:pPr/>
-            <a:r>
-              <a:rPr lang="en-US"/>
-              <a:t>CPU0-3</a:t>
-            </a:r>
-            <a:r>
-              <a:rPr lang="zh-CN"/>
-              <a:t>轮流从队列头部取任务</a:t>
-            </a:r>
-            <a:endParaRPr/>
+            <a:endParaRPr lang="zh-CN"/>
           </a:p>
         </p:txBody>
       </p:sp>
@@ -7306,7 +7298,7 @@
                 <a:ea typeface="宋体"/>
                 <a:cs typeface="+mn-cs"/>
               </a:rPr>
-              <a:t>基于时间轮转</a:t>
+              <a:t>基于时间片轮转</a:t>
             </a:r>
             <a:endParaRPr lang="en-US">
               <a:latin typeface="Comic Sans MS"/>
@@ -7637,18 +7629,29 @@
                 <a:ea typeface="宋体"/>
                 <a:cs typeface="+mn-cs"/>
               </a:rPr>
-              <a:t>，因为实际情况因素很多，某方面最优一般都伴随其他方面的副作用</a:t>
-            </a:r>
-            <a:endParaRPr lang="en-US">
-              <a:solidFill>
-                <a:srgbClr val="22228B">
-                  <a:alpha val="100000"/>
-                </a:srgbClr>
-              </a:solidFill>
-              <a:latin typeface="Comic Sans MS"/>
-              <a:ea typeface="宋体"/>
-              <a:cs typeface="+mn-cs"/>
-            </a:endParaRPr>
+              <a:t>，某方面最优一般都伴随其他方面的副作用</a:t>
+            </a:r>
+            <a:endParaRPr/>
+          </a:p>
+          <a:p>
+            <a:pPr lvl="1">
+              <a:buFont typeface="Wingdings" panose="05000000000000000000"/>
+              <a:buChar char="Ø"/>
+            </a:pPr>
+            <a:r>
+              <a:rPr lang="en-US">
+                <a:solidFill>
+                  <a:srgbClr val="22228B">
+                    <a:alpha val="100000"/>
+                  </a:srgbClr>
+                </a:solidFill>
+                <a:latin typeface="Comic Sans MS"/>
+                <a:ea typeface="宋体"/>
+                <a:cs typeface="+mn-cs"/>
+              </a:rPr>
+              <a:t>e.g., CAP, RUM</a:t>
+            </a:r>
+            <a:endParaRPr/>
           </a:p>
           <a:p>
             <a:pPr>
@@ -8267,11 +8270,31 @@
               <a:buChar char="–"/>
             </a:pPr>
             <a:r>
+              <a:rPr lang="en-US">
+                <a:latin typeface="Comic Sans MS"/>
+                <a:ea typeface="宋体"/>
+              </a:rPr>
+              <a:t>I/O</a:t>
+            </a:r>
+            <a:r>
               <a:rPr lang="zh-CN">
                 <a:latin typeface="Comic Sans MS"/>
                 <a:ea typeface="宋体"/>
               </a:rPr>
-              <a:t>把</a:t>
+              <a:t>时将任务移出就绪队列</a:t>
+            </a:r>
+            <a:endParaRPr/>
+          </a:p>
+          <a:p>
+            <a:pPr lvl="1">
+              <a:buChar char="–"/>
+            </a:pPr>
+            <a:r>
+              <a:rPr lang="zh-CN">
+                <a:latin typeface="Comic Sans MS"/>
+                <a:ea typeface="宋体"/>
+              </a:rPr>
+              <a:t>每次</a:t>
             </a:r>
             <a:r>
               <a:rPr lang="en-US">
@@ -8285,35 +8308,42 @@
                 <a:latin typeface="Comic Sans MS"/>
                 <a:ea typeface="宋体"/>
               </a:rPr>
-              <a:t>看做</a:t>
+              <a:t>开始</a:t>
             </a:r>
             <a:r>
               <a:rPr lang="en-US">
                 <a:latin typeface="Comic Sans MS"/>
                 <a:ea typeface="宋体"/>
               </a:rPr>
-              <a:t>5</a:t>
+              <a:t>I/O</a:t>
             </a:r>
             <a:r>
               <a:rPr lang="zh-CN">
                 <a:latin typeface="Comic Sans MS"/>
                 <a:ea typeface="宋体"/>
               </a:rPr>
-              <a:t>个</a:t>
+              <a:t>时，调度器只剩</a:t>
             </a:r>
             <a:r>
               <a:rPr lang="en-US">
                 <a:latin typeface="Comic Sans MS"/>
                 <a:ea typeface="宋体"/>
               </a:rPr>
-              <a:t>10ms</a:t>
+              <a:t>B</a:t>
             </a:r>
             <a:r>
               <a:rPr lang="zh-CN">
                 <a:latin typeface="Comic Sans MS"/>
                 <a:ea typeface="宋体"/>
               </a:rPr>
-              <a:t>的子任务</a:t>
+              <a:t>一个选项，调度</a:t>
+            </a:r>
+            <a:r>
+              <a:rPr lang="en-US">
+                <a:latin typeface="Comic Sans MS"/>
+                <a:ea typeface="宋体"/>
+              </a:rPr>
+              <a:t>B</a:t>
             </a:r>
             <a:endParaRPr lang="en-US">
               <a:latin typeface="Comic Sans MS"/>
@@ -8329,13 +8359,41 @@
                 <a:latin typeface="Comic Sans MS"/>
                 <a:ea typeface="宋体"/>
               </a:rPr>
-              <a:t>每次</a:t>
+              <a:t>当</a:t>
             </a:r>
             <a:r>
               <a:rPr lang="en-US">
                 <a:latin typeface="Comic Sans MS"/>
                 <a:ea typeface="宋体"/>
               </a:rPr>
+              <a:t>I/O</a:t>
+            </a:r>
+            <a:r>
+              <a:rPr lang="zh-CN">
+                <a:latin typeface="Comic Sans MS"/>
+                <a:ea typeface="宋体"/>
+              </a:rPr>
+              <a:t>完成时（</a:t>
+            </a:r>
+            <a:r>
+              <a:rPr lang="en-US">
+                <a:latin typeface="Comic Sans MS"/>
+                <a:ea typeface="宋体"/>
+              </a:rPr>
+              <a:t>interrupt</a:t>
+            </a:r>
+            <a:r>
+              <a:rPr lang="zh-CN">
+                <a:latin typeface="Comic Sans MS"/>
+                <a:ea typeface="宋体"/>
+              </a:rPr>
+              <a:t>），</a:t>
+            </a:r>
+            <a:r>
+              <a:rPr lang="en-US">
+                <a:latin typeface="Comic Sans MS"/>
+                <a:ea typeface="宋体"/>
+              </a:rPr>
               <a:t>A</a:t>
             </a:r>
             <a:r>
@@ -8343,100 +8401,7 @@
                 <a:latin typeface="Comic Sans MS"/>
                 <a:ea typeface="宋体"/>
               </a:rPr>
-              <a:t>开始</a:t>
-            </a:r>
-            <a:r>
-              <a:rPr lang="en-US">
-                <a:latin typeface="Comic Sans MS"/>
-                <a:ea typeface="宋体"/>
-              </a:rPr>
-              <a:t>I/O</a:t>
-            </a:r>
-            <a:r>
-              <a:rPr lang="zh-CN">
-                <a:latin typeface="Comic Sans MS"/>
-                <a:ea typeface="宋体"/>
-              </a:rPr>
-              <a:t>时，调度器只剩</a:t>
-            </a:r>
-            <a:r>
-              <a:rPr lang="en-US">
-                <a:latin typeface="Comic Sans MS"/>
-                <a:ea typeface="宋体"/>
-              </a:rPr>
-              <a:t>B</a:t>
-            </a:r>
-            <a:r>
-              <a:rPr lang="zh-CN">
-                <a:latin typeface="Comic Sans MS"/>
-                <a:ea typeface="宋体"/>
-              </a:rPr>
-              <a:t>一个选项，调度</a:t>
-            </a:r>
-            <a:r>
-              <a:rPr lang="en-US">
-                <a:latin typeface="Comic Sans MS"/>
-                <a:ea typeface="宋体"/>
-              </a:rPr>
-              <a:t>B</a:t>
-            </a:r>
-            <a:endParaRPr lang="en-US">
-              <a:latin typeface="Comic Sans MS"/>
-              <a:ea typeface="宋体"/>
-            </a:endParaRPr>
-          </a:p>
-          <a:p>
-            <a:pPr lvl="1">
-              <a:buChar char="–"/>
-            </a:pPr>
-            <a:r>
-              <a:rPr lang="zh-CN">
-                <a:latin typeface="Comic Sans MS"/>
-                <a:ea typeface="宋体"/>
-              </a:rPr>
-              <a:t>当</a:t>
-            </a:r>
-            <a:r>
-              <a:rPr lang="en-US">
-                <a:latin typeface="Comic Sans MS"/>
-                <a:ea typeface="宋体"/>
-              </a:rPr>
-              <a:t>I/O</a:t>
-            </a:r>
-            <a:r>
-              <a:rPr lang="zh-CN">
-                <a:latin typeface="Comic Sans MS"/>
-                <a:ea typeface="宋体"/>
-              </a:rPr>
-              <a:t>完成时（</a:t>
-            </a:r>
-            <a:r>
-              <a:rPr lang="en-US">
-                <a:latin typeface="Comic Sans MS"/>
-                <a:ea typeface="宋体"/>
-              </a:rPr>
-              <a:t>interrupt</a:t>
-            </a:r>
-            <a:r>
-              <a:rPr lang="zh-CN">
-                <a:latin typeface="Comic Sans MS"/>
-                <a:ea typeface="宋体"/>
-              </a:rPr>
-              <a:t>），</a:t>
-            </a:r>
-            <a:r>
-              <a:rPr lang="en-US">
-                <a:latin typeface="Comic Sans MS"/>
-                <a:ea typeface="宋体"/>
-              </a:rPr>
-              <a:t>A</a:t>
-            </a:r>
-            <a:r>
-              <a:rPr lang="zh-CN">
-                <a:latin typeface="Comic Sans MS"/>
-                <a:ea typeface="宋体"/>
-              </a:rPr>
-              <a:t>未完成</a:t>
+              <a:t>回到就绪队列</a:t>
             </a:r>
             <a:r>
               <a:rPr lang="zh-CN">
@@ -10598,6 +10563,10 @@
           </p:nvPr>
         </p:nvSpPr>
         <p:spPr>
+          <a:xfrm rot="0" flipH="false" flipV="false">
+            <a:off x="285970" y="1562100"/>
+            <a:ext cx="8572060" cy="4419600"/>
+          </a:xfrm>
           <a:ln/>
         </p:spPr>
         <p:txBody>
@@ -10665,7 +10634,14 @@
                 <a:latin typeface="Comic Sans MS"/>
                 <a:ea typeface="宋体"/>
               </a:rPr>
-              <a:t>交互，让出</a:t>
+              <a:t>交互（包括磁盘</a:t>
+            </a:r>
+            <a:r>
+              <a:rPr lang="zh-CN">
+                <a:latin typeface="Comic Sans MS"/>
+                <a:ea typeface="宋体"/>
+              </a:rPr>
+              <a:t>、网络、键盘鼠标等），让出</a:t>
             </a:r>
             <a:r>
               <a:rPr lang="en-US">
@@ -13153,7 +13129,7 @@
             </a:r>
             <a:r>
               <a:rPr lang="zh-CN"/>
-              <a:t>发射</a:t>
+              <a:t>发送</a:t>
             </a:r>
             <a:r>
               <a:rPr lang="en-US"/>
@@ -16807,7 +16783,7 @@
 </file>
 
 <file path=ppt/slides/slide40.xml><?xml version="1.0" encoding="utf-8"?>
-<p:sld xmlns:a="http://schemas.openxmlformats.org/drawingml/2006/main" xmlns:p="http://schemas.openxmlformats.org/presentationml/2006/main" xmlns:r="http://schemas.openxmlformats.org/officeDocument/2006/relationships">
+<p:sld xmlns:a="http://schemas.openxmlformats.org/drawingml/2006/main" xmlns:p="http://schemas.openxmlformats.org/presentationml/2006/main" xmlns:r="http://schemas.openxmlformats.org/officeDocument/2006/relationships" show="false">
   <p:cSld>
     <p:spTree>
       <p:nvGrpSpPr>
@@ -23282,171 +23258,218 @@
         <p:txBody>
           <a:bodyPr vert="horz" wrap="square" lIns="91440" tIns="45720" rIns="91440" bIns="45720" anchor="t" anchorCtr="false"/>
           <a:p>
-            <a:pPr/>
-            <a:r>
-              <a:rPr lang="en-US" altLang="zh-CN">
-                <a:ea typeface="宋体" pitchFamily="2" charset="-122"/>
+            <a:pPr>
+              <a:buChar char="•"/>
+            </a:pPr>
+            <a:r>
+              <a:rPr lang="en-US">
+                <a:latin typeface="Comic Sans MS"/>
+                <a:ea typeface="宋体"/>
+                <a:cs typeface="+mn-cs"/>
               </a:rPr>
               <a:t>Linux</a:t>
             </a:r>
             <a:r>
-              <a:rPr lang="zh-CN" altLang="en-US">
-                <a:ea typeface="宋体" pitchFamily="2" charset="-122"/>
+              <a:rPr lang="zh-CN">
+                <a:latin typeface="Comic Sans MS"/>
+                <a:ea typeface="宋体"/>
+                <a:cs typeface="+mn-cs"/>
               </a:rPr>
               <a:t>的多核</a:t>
             </a:r>
             <a:r>
-              <a:rPr lang="en-US" altLang="zh-CN">
-                <a:ea typeface="宋体" pitchFamily="2" charset="-122"/>
+              <a:rPr lang="en-US">
+                <a:latin typeface="Comic Sans MS"/>
+                <a:ea typeface="宋体"/>
+                <a:cs typeface="+mn-cs"/>
               </a:rPr>
               <a:t>CPU</a:t>
             </a:r>
             <a:r>
-              <a:rPr lang="zh-CN" altLang="en-US">
-                <a:ea typeface="宋体" pitchFamily="2" charset="-122"/>
+              <a:rPr lang="zh-CN">
+                <a:latin typeface="Comic Sans MS"/>
+                <a:ea typeface="宋体"/>
+                <a:cs typeface="+mn-cs"/>
               </a:rPr>
               <a:t>调度策略</a:t>
             </a:r>
-            <a:endParaRPr lang="en-US" altLang="zh-CN">
-              <a:ea typeface="宋体" pitchFamily="2" charset="-122"/>
-            </a:endParaRPr>
-          </a:p>
-          <a:p>
-            <a:pPr lvl="1"/>
-            <a:r>
-              <a:rPr lang="zh-CN" altLang="en-US">
-                <a:ea typeface="宋体" pitchFamily="2" charset="-122"/>
+            <a:endParaRPr lang="en-US">
+              <a:latin typeface="Comic Sans MS"/>
+              <a:ea typeface="宋体"/>
+              <a:cs typeface="+mn-cs"/>
+            </a:endParaRPr>
+          </a:p>
+          <a:p>
+            <a:pPr lvl="1">
+              <a:buChar char="–"/>
+            </a:pPr>
+            <a:r>
+              <a:rPr lang="zh-CN">
+                <a:latin typeface="Comic Sans MS"/>
+                <a:ea typeface="宋体"/>
               </a:rPr>
               <a:t>没有一种确定的方案完全优于其他</a:t>
             </a:r>
-            <a:endParaRPr lang="en-US" altLang="zh-CN">
-              <a:ea typeface="宋体" pitchFamily="2" charset="-122"/>
-            </a:endParaRPr>
-          </a:p>
-          <a:p>
-            <a:pPr lvl="1"/>
-            <a:r>
-              <a:rPr lang="en-US" altLang="zh-CN">
-                <a:ea typeface="宋体" pitchFamily="2" charset="-122"/>
+            <a:endParaRPr lang="en-US">
+              <a:latin typeface="Comic Sans MS"/>
+              <a:ea typeface="宋体"/>
+            </a:endParaRPr>
+          </a:p>
+          <a:p>
+            <a:pPr lvl="1">
+              <a:buChar char="–"/>
+            </a:pPr>
+            <a:r>
+              <a:rPr lang="en-US">
+                <a:latin typeface="Comic Sans MS"/>
+                <a:ea typeface="宋体"/>
               </a:rPr>
               <a:t>CFS</a:t>
             </a:r>
             <a:r>
-              <a:rPr lang="zh-CN" altLang="en-US">
-                <a:ea typeface="宋体" pitchFamily="2" charset="-122"/>
+              <a:rPr lang="zh-CN">
+                <a:latin typeface="Comic Sans MS"/>
+                <a:ea typeface="宋体"/>
               </a:rPr>
               <a:t>（</a:t>
             </a:r>
             <a:r>
-              <a:rPr lang="en-US" altLang="zh-CN">
-                <a:ea typeface="宋体" pitchFamily="2" charset="-122"/>
+              <a:rPr lang="en-US">
+                <a:latin typeface="Comic Sans MS"/>
+                <a:ea typeface="宋体"/>
               </a:rPr>
               <a:t>Completely Fair Scheduler</a:t>
             </a:r>
             <a:r>
-              <a:rPr lang="zh-CN" altLang="en-US">
-                <a:ea typeface="宋体" pitchFamily="2" charset="-122"/>
+              <a:rPr lang="zh-CN">
+                <a:latin typeface="Comic Sans MS"/>
+                <a:ea typeface="宋体"/>
               </a:rPr>
               <a:t>）：多队列</a:t>
             </a:r>
-            <a:endParaRPr lang="en-US" altLang="zh-CN">
-              <a:ea typeface="宋体" pitchFamily="2" charset="-122"/>
-            </a:endParaRPr>
-          </a:p>
-          <a:p>
-            <a:pPr lvl="2"/>
-            <a:r>
-              <a:rPr lang="zh-CN" altLang="en-US">
-                <a:ea typeface="宋体" pitchFamily="2" charset="-122"/>
+            <a:endParaRPr lang="en-US">
+              <a:latin typeface="Comic Sans MS"/>
+              <a:ea typeface="宋体"/>
+            </a:endParaRPr>
+          </a:p>
+          <a:p>
+            <a:pPr lvl="2">
+              <a:buChar char="•"/>
+            </a:pPr>
+            <a:r>
+              <a:rPr lang="zh-CN">
+                <a:latin typeface="Comic Sans MS"/>
+                <a:ea typeface="宋体"/>
               </a:rPr>
               <a:t>类似于</a:t>
             </a:r>
             <a:r>
-              <a:rPr lang="en-US" altLang="zh-CN">
-                <a:ea typeface="宋体" pitchFamily="2" charset="-122"/>
+              <a:rPr lang="en-US">
+                <a:latin typeface="Comic Sans MS"/>
+                <a:ea typeface="宋体"/>
               </a:rPr>
               <a:t>stride scheduler</a:t>
             </a:r>
-            <a:endParaRPr lang="en-US" altLang="zh-CN">
-              <a:ea typeface="宋体" pitchFamily="2" charset="-122"/>
-            </a:endParaRPr>
-          </a:p>
-          <a:p>
-            <a:pPr lvl="1"/>
-            <a:r>
-              <a:rPr lang="en-US" altLang="zh-CN">
-                <a:ea typeface="宋体" pitchFamily="2" charset="-122"/>
+            <a:endParaRPr lang="en-US">
+              <a:latin typeface="Comic Sans MS"/>
+              <a:ea typeface="宋体"/>
+            </a:endParaRPr>
+          </a:p>
+          <a:p>
+            <a:pPr lvl="1">
+              <a:buChar char="–"/>
+            </a:pPr>
+            <a:r>
+              <a:rPr lang="en-US">
+                <a:latin typeface="Comic Sans MS"/>
+                <a:ea typeface="宋体"/>
               </a:rPr>
               <a:t>BFS</a:t>
             </a:r>
             <a:r>
-              <a:rPr lang="zh-CN" altLang="en-US">
-                <a:ea typeface="宋体" pitchFamily="2" charset="-122"/>
+              <a:rPr lang="zh-CN">
+                <a:latin typeface="Comic Sans MS"/>
+                <a:ea typeface="宋体"/>
               </a:rPr>
               <a:t>（</a:t>
             </a:r>
             <a:r>
-              <a:rPr lang="en-US" altLang="zh-CN">
-                <a:ea typeface="宋体" pitchFamily="2" charset="-122"/>
-              </a:rPr>
-              <a:t>BF</a:t>
-            </a:r>
-            <a:r>
-              <a:rPr lang="zh-CN" altLang="en-US">
-                <a:ea typeface="宋体" pitchFamily="2" charset="-122"/>
+              <a:rPr lang="en-US">
+                <a:latin typeface="Comic Sans MS"/>
+                <a:ea typeface="宋体"/>
+              </a:rPr>
+              <a:t>Brain-Fuck</a:t>
+            </a:r>
+            <a:r>
+              <a:rPr lang="zh-CN">
+                <a:latin typeface="Comic Sans MS"/>
+                <a:ea typeface="宋体"/>
               </a:rPr>
               <a:t> </a:t>
             </a:r>
             <a:r>
-              <a:rPr lang="en-US" altLang="zh-CN">
-                <a:ea typeface="宋体" pitchFamily="2" charset="-122"/>
+              <a:rPr lang="en-US">
+                <a:latin typeface="Comic Sans MS"/>
+                <a:ea typeface="宋体"/>
               </a:rPr>
               <a:t>Scheduler</a:t>
             </a:r>
             <a:r>
-              <a:rPr lang="zh-CN" altLang="en-US">
-                <a:ea typeface="宋体" pitchFamily="2" charset="-122"/>
+              <a:rPr lang="zh-CN">
+                <a:latin typeface="Comic Sans MS"/>
+                <a:ea typeface="宋体"/>
               </a:rPr>
               <a:t>）：单队列</a:t>
             </a:r>
-            <a:endParaRPr lang="en-US" altLang="zh-CN">
-              <a:ea typeface="宋体" pitchFamily="2" charset="-122"/>
-            </a:endParaRPr>
-          </a:p>
-          <a:p>
-            <a:pPr lvl="1"/>
-            <a:r>
-              <a:rPr lang="en-US" altLang="zh-CN">
-                <a:ea typeface="宋体" pitchFamily="2" charset="-122"/>
+            <a:endParaRPr lang="en-US">
+              <a:latin typeface="Comic Sans MS"/>
+              <a:ea typeface="宋体"/>
+            </a:endParaRPr>
+          </a:p>
+          <a:p>
+            <a:pPr lvl="1">
+              <a:buChar char="–"/>
+            </a:pPr>
+            <a:r>
+              <a:rPr lang="en-US">
+                <a:latin typeface="Comic Sans MS"/>
+                <a:ea typeface="宋体"/>
               </a:rPr>
               <a:t>O(1) Scheduler</a:t>
             </a:r>
             <a:r>
-              <a:rPr lang="zh-CN" altLang="en-US">
-                <a:ea typeface="宋体" pitchFamily="2" charset="-122"/>
+              <a:rPr lang="zh-CN">
+                <a:latin typeface="Comic Sans MS"/>
+                <a:ea typeface="宋体"/>
               </a:rPr>
               <a:t>：多队列</a:t>
             </a:r>
-            <a:endParaRPr lang="en-US" altLang="zh-CN">
-              <a:ea typeface="宋体" pitchFamily="2" charset="-122"/>
-            </a:endParaRPr>
-          </a:p>
-          <a:p>
-            <a:pPr lvl="2"/>
-            <a:r>
-              <a:rPr lang="zh-CN" altLang="en-US">
-                <a:ea typeface="宋体" pitchFamily="2" charset="-122"/>
+            <a:endParaRPr lang="en-US">
+              <a:latin typeface="Comic Sans MS"/>
+              <a:ea typeface="宋体"/>
+            </a:endParaRPr>
+          </a:p>
+          <a:p>
+            <a:pPr lvl="2">
+              <a:buChar char="•"/>
+            </a:pPr>
+            <a:r>
+              <a:rPr lang="zh-CN">
+                <a:latin typeface="Comic Sans MS"/>
+                <a:ea typeface="宋体"/>
               </a:rPr>
               <a:t>类似于</a:t>
             </a:r>
             <a:r>
-              <a:rPr lang="en-US" altLang="zh-CN">
-                <a:ea typeface="宋体" pitchFamily="2" charset="-122"/>
+              <a:rPr lang="en-US">
+                <a:latin typeface="Comic Sans MS"/>
+                <a:ea typeface="宋体"/>
               </a:rPr>
               <a:t>MLFQ</a:t>
             </a:r>
-            <a:endParaRPr lang="zh-CN" altLang="en-US">
-              <a:ea typeface="宋体" pitchFamily="2" charset="-122"/>
+            <a:endParaRPr lang="zh-CN">
+              <a:latin typeface="Comic Sans MS"/>
+              <a:ea typeface="宋体"/>
             </a:endParaRPr>
           </a:p>
         </p:txBody>
@@ -36313,38 +36336,6 @@
             <a:pPr>
               <a:buChar char="•"/>
             </a:pPr>
-            <a:r>
-              <a:rPr lang="en-US">
-                <a:latin typeface="Comic Sans MS"/>
-                <a:ea typeface="宋体"/>
-                <a:cs typeface="+mn-cs"/>
-              </a:rPr>
-              <a:t>3</a:t>
-            </a:r>
-            <a:r>
-              <a:rPr lang="zh-CN">
-                <a:latin typeface="Comic Sans MS"/>
-                <a:ea typeface="宋体"/>
-                <a:cs typeface="+mn-cs"/>
-              </a:rPr>
-              <a:t>月</a:t>
-            </a:r>
-            <a:r>
-              <a:rPr lang="en-US">
-                <a:latin typeface="Comic Sans MS"/>
-                <a:ea typeface="宋体"/>
-                <a:cs typeface="+mn-cs"/>
-              </a:rPr>
-              <a:t>25</a:t>
-            </a:r>
-            <a:r>
-              <a:rPr lang="zh-CN">
-                <a:latin typeface="Comic Sans MS"/>
-                <a:ea typeface="宋体"/>
-                <a:cs typeface="+mn-cs"/>
-              </a:rPr>
-              <a:t>日提交</a:t>
-            </a:r>
             <a:endParaRPr lang="zh-CN">
               <a:latin typeface="Comic Sans MS"/>
               <a:ea typeface="宋体"/>
@@ -36792,219 +36783,284 @@
         <p:txBody>
           <a:bodyPr vert="horz" wrap="square" lIns="91440" tIns="45720" rIns="91440" bIns="45720" anchor="t" anchorCtr="false"/>
           <a:p>
-            <a:pPr/>
-            <a:r>
-              <a:rPr lang="zh-CN" altLang="en-US">
-                <a:ea typeface="宋体" pitchFamily="2" charset="-122"/>
-              </a:rPr>
-              <a:t>对于任务同时到到， </a:t>
-            </a:r>
-            <a:r>
-              <a:rPr lang="en-US" altLang="zh-CN">
-                <a:ea typeface="宋体" pitchFamily="2" charset="-122"/>
+            <a:pPr>
+              <a:buChar char="•"/>
+            </a:pPr>
+            <a:r>
+              <a:rPr lang="zh-CN">
+                <a:latin typeface="Comic Sans MS"/>
+                <a:ea typeface="宋体"/>
+                <a:cs typeface="+mn-cs"/>
+              </a:rPr>
+              <a:t>对于任务同时到达，</a:t>
+            </a:r>
+            <a:r>
+              <a:rPr lang="zh-CN">
+                <a:latin typeface="Comic Sans MS"/>
+                <a:ea typeface="宋体"/>
+                <a:cs typeface="+mn-cs"/>
+              </a:rPr>
+              <a:t> </a:t>
+            </a:r>
+            <a:r>
+              <a:rPr lang="en-US">
+                <a:latin typeface="Comic Sans MS"/>
+                <a:ea typeface="宋体"/>
+                <a:cs typeface="+mn-cs"/>
               </a:rPr>
               <a:t>SJF</a:t>
             </a:r>
             <a:r>
-              <a:rPr lang="zh-CN" altLang="en-US">
-                <a:ea typeface="宋体" pitchFamily="2" charset="-122"/>
+              <a:rPr lang="zh-CN">
+                <a:latin typeface="Comic Sans MS"/>
+                <a:ea typeface="宋体"/>
+                <a:cs typeface="+mn-cs"/>
               </a:rPr>
               <a:t>是最优调度算法了</a:t>
             </a:r>
-            <a:endParaRPr lang="en-US" altLang="zh-CN">
-              <a:ea typeface="宋体" pitchFamily="2" charset="-122"/>
-            </a:endParaRPr>
-          </a:p>
-          <a:p>
-            <a:pPr/>
-            <a:r>
-              <a:rPr lang="zh-CN" altLang="en-US">
-                <a:ea typeface="宋体" pitchFamily="2" charset="-122"/>
+            <a:endParaRPr lang="en-US">
+              <a:latin typeface="Comic Sans MS"/>
+              <a:ea typeface="宋体"/>
+              <a:cs typeface="+mn-cs"/>
+            </a:endParaRPr>
+          </a:p>
+          <a:p>
+            <a:pPr>
+              <a:buChar char="•"/>
+            </a:pPr>
+            <a:r>
+              <a:rPr lang="zh-CN">
+                <a:latin typeface="Comic Sans MS"/>
+                <a:ea typeface="宋体"/>
+                <a:cs typeface="+mn-cs"/>
               </a:rPr>
               <a:t>但如果长任务</a:t>
             </a:r>
             <a:r>
-              <a:rPr lang="en-US" altLang="zh-CN">
-                <a:ea typeface="宋体" pitchFamily="2" charset="-122"/>
+              <a:rPr lang="en-US">
+                <a:latin typeface="Comic Sans MS"/>
+                <a:ea typeface="宋体"/>
+                <a:cs typeface="+mn-cs"/>
               </a:rPr>
               <a:t>A</a:t>
             </a:r>
             <a:r>
-              <a:rPr lang="zh-CN" altLang="en-US">
-                <a:ea typeface="宋体" pitchFamily="2" charset="-122"/>
+              <a:rPr lang="zh-CN">
+                <a:latin typeface="Comic Sans MS"/>
+                <a:ea typeface="宋体"/>
+                <a:cs typeface="+mn-cs"/>
               </a:rPr>
               <a:t>先到达，则</a:t>
             </a:r>
             <a:r>
-              <a:rPr lang="en-US" altLang="zh-CN">
-                <a:ea typeface="宋体" pitchFamily="2" charset="-122"/>
+              <a:rPr lang="en-US">
+                <a:latin typeface="Comic Sans MS"/>
+                <a:ea typeface="宋体"/>
+                <a:cs typeface="+mn-cs"/>
               </a:rPr>
               <a:t>SJF</a:t>
             </a:r>
             <a:r>
-              <a:rPr lang="zh-CN" altLang="en-US">
-                <a:ea typeface="宋体" pitchFamily="2" charset="-122"/>
+              <a:rPr lang="zh-CN">
+                <a:latin typeface="Comic Sans MS"/>
+                <a:ea typeface="宋体"/>
+                <a:cs typeface="+mn-cs"/>
               </a:rPr>
               <a:t>没有办法</a:t>
             </a:r>
-            <a:endParaRPr lang="en-US" altLang="zh-CN">
-              <a:ea typeface="宋体" pitchFamily="2" charset="-122"/>
-            </a:endParaRPr>
-          </a:p>
-          <a:p>
-            <a:pPr lvl="1"/>
-            <a:r>
-              <a:rPr lang="zh-CN" altLang="en-US">
-                <a:ea typeface="宋体" pitchFamily="2" charset="-122"/>
+            <a:endParaRPr lang="en-US">
+              <a:latin typeface="Comic Sans MS"/>
+              <a:ea typeface="宋体"/>
+              <a:cs typeface="+mn-cs"/>
+            </a:endParaRPr>
+          </a:p>
+          <a:p>
+            <a:pPr lvl="1">
+              <a:buChar char="–"/>
+            </a:pPr>
+            <a:r>
+              <a:rPr lang="zh-CN">
+                <a:latin typeface="Comic Sans MS"/>
+                <a:ea typeface="宋体"/>
               </a:rPr>
               <a:t>例如</a:t>
             </a:r>
             <a:r>
-              <a:rPr lang="en-US" altLang="zh-CN">
-                <a:ea typeface="宋体" pitchFamily="2" charset="-122"/>
+              <a:rPr lang="en-US">
+                <a:latin typeface="Comic Sans MS"/>
+                <a:ea typeface="宋体"/>
               </a:rPr>
               <a:t>A</a:t>
             </a:r>
             <a:r>
-              <a:rPr lang="zh-CN" altLang="en-US">
-                <a:ea typeface="宋体" pitchFamily="2" charset="-122"/>
+              <a:rPr lang="zh-CN">
+                <a:latin typeface="Comic Sans MS"/>
+                <a:ea typeface="宋体"/>
               </a:rPr>
               <a:t>在</a:t>
             </a:r>
             <a:r>
-              <a:rPr lang="en-US" altLang="zh-CN">
-                <a:ea typeface="宋体" pitchFamily="2" charset="-122"/>
+              <a:rPr lang="en-US">
+                <a:latin typeface="Comic Sans MS"/>
+                <a:ea typeface="宋体"/>
               </a:rPr>
               <a:t>0</a:t>
             </a:r>
             <a:r>
-              <a:rPr lang="zh-CN" altLang="en-US">
-                <a:ea typeface="宋体" pitchFamily="2" charset="-122"/>
+              <a:rPr lang="zh-CN">
+                <a:latin typeface="Comic Sans MS"/>
+                <a:ea typeface="宋体"/>
               </a:rPr>
               <a:t>时刻到达，</a:t>
             </a:r>
             <a:r>
-              <a:rPr lang="en-US" altLang="zh-CN">
-                <a:ea typeface="宋体" pitchFamily="2" charset="-122"/>
+              <a:rPr lang="en-US">
+                <a:latin typeface="Comic Sans MS"/>
+                <a:ea typeface="宋体"/>
               </a:rPr>
               <a:t>B</a:t>
             </a:r>
             <a:r>
-              <a:rPr lang="zh-CN" altLang="en-US">
-                <a:ea typeface="宋体" pitchFamily="2" charset="-122"/>
+              <a:rPr lang="zh-CN">
+                <a:latin typeface="Comic Sans MS"/>
+                <a:ea typeface="宋体"/>
               </a:rPr>
               <a:t>和</a:t>
             </a:r>
             <a:r>
-              <a:rPr lang="en-US" altLang="zh-CN">
-                <a:ea typeface="宋体" pitchFamily="2" charset="-122"/>
+              <a:rPr lang="en-US">
+                <a:latin typeface="Comic Sans MS"/>
+                <a:ea typeface="宋体"/>
               </a:rPr>
               <a:t>C</a:t>
             </a:r>
             <a:r>
-              <a:rPr lang="zh-CN" altLang="en-US">
-                <a:ea typeface="宋体" pitchFamily="2" charset="-122"/>
+              <a:rPr lang="zh-CN">
+                <a:latin typeface="Comic Sans MS"/>
+                <a:ea typeface="宋体"/>
               </a:rPr>
               <a:t>在</a:t>
             </a:r>
             <a:r>
-              <a:rPr lang="en-US" altLang="zh-CN">
-                <a:ea typeface="宋体" pitchFamily="2" charset="-122"/>
+              <a:rPr lang="en-US">
+                <a:latin typeface="Comic Sans MS"/>
+                <a:ea typeface="宋体"/>
               </a:rPr>
               <a:t>10</a:t>
             </a:r>
             <a:r>
-              <a:rPr lang="zh-CN" altLang="en-US">
-                <a:ea typeface="宋体" pitchFamily="2" charset="-122"/>
+              <a:rPr lang="zh-CN">
+                <a:latin typeface="Comic Sans MS"/>
+                <a:ea typeface="宋体"/>
               </a:rPr>
               <a:t>时刻到达</a:t>
             </a:r>
-            <a:endParaRPr lang="en-US" altLang="zh-CN">
-              <a:ea typeface="宋体" pitchFamily="2" charset="-122"/>
-            </a:endParaRPr>
-          </a:p>
-          <a:p>
-            <a:pPr lvl="1"/>
-            <a:r>
-              <a:rPr lang="zh-CN" altLang="en-US">
-                <a:ea typeface="宋体" pitchFamily="2" charset="-122"/>
+            <a:endParaRPr lang="en-US">
+              <a:latin typeface="Comic Sans MS"/>
+              <a:ea typeface="宋体"/>
+            </a:endParaRPr>
+          </a:p>
+          <a:p>
+            <a:pPr lvl="1">
+              <a:buChar char="–"/>
+            </a:pPr>
+            <a:r>
+              <a:rPr lang="zh-CN">
+                <a:latin typeface="Comic Sans MS"/>
+                <a:ea typeface="宋体"/>
               </a:rPr>
               <a:t>平均</a:t>
             </a:r>
             <a:r>
-              <a:rPr lang="en-US" altLang="zh-CN">
-                <a:ea typeface="宋体" pitchFamily="2" charset="-122"/>
+              <a:rPr lang="en-US">
+                <a:latin typeface="Comic Sans MS"/>
+                <a:ea typeface="宋体"/>
               </a:rPr>
               <a:t>Turnaround</a:t>
             </a:r>
             <a:r>
-              <a:rPr lang="zh-CN" altLang="en-US">
-                <a:ea typeface="宋体" pitchFamily="2" charset="-122"/>
+              <a:rPr lang="zh-CN">
+                <a:latin typeface="Comic Sans MS"/>
+                <a:ea typeface="宋体"/>
               </a:rPr>
               <a:t> </a:t>
             </a:r>
             <a:r>
-              <a:rPr lang="en-US" altLang="zh-CN">
-                <a:ea typeface="宋体" pitchFamily="2" charset="-122"/>
+              <a:rPr lang="en-US">
+                <a:latin typeface="Comic Sans MS"/>
+                <a:ea typeface="宋体"/>
               </a:rPr>
               <a:t>time</a:t>
             </a:r>
             <a:r>
-              <a:rPr lang="zh-CN" altLang="en-US">
-                <a:ea typeface="宋体" pitchFamily="2" charset="-122"/>
+              <a:rPr lang="zh-CN">
+                <a:latin typeface="Comic Sans MS"/>
+                <a:ea typeface="宋体"/>
               </a:rPr>
               <a:t> </a:t>
             </a:r>
             <a:r>
-              <a:rPr lang="en-US" altLang="zh-CN">
-                <a:ea typeface="宋体" pitchFamily="2" charset="-122"/>
+              <a:rPr lang="en-US">
+                <a:latin typeface="Comic Sans MS"/>
+                <a:ea typeface="宋体"/>
               </a:rPr>
               <a:t>=</a:t>
             </a:r>
             <a:r>
-              <a:rPr lang="zh-CN" altLang="en-US">
-                <a:ea typeface="宋体" pitchFamily="2" charset="-122"/>
+              <a:rPr lang="zh-CN">
+                <a:latin typeface="Comic Sans MS"/>
+                <a:ea typeface="宋体"/>
               </a:rPr>
               <a:t> </a:t>
             </a:r>
             <a:r>
-              <a:rPr lang="en-US" altLang="zh-CN">
-                <a:ea typeface="宋体" pitchFamily="2" charset="-122"/>
+              <a:rPr lang="en-US">
+                <a:latin typeface="Comic Sans MS"/>
+                <a:ea typeface="宋体"/>
               </a:rPr>
               <a:t>(100+100+110)/3</a:t>
             </a:r>
             <a:r>
-              <a:rPr lang="zh-CN" altLang="en-US">
-                <a:ea typeface="宋体" pitchFamily="2" charset="-122"/>
+              <a:rPr lang="zh-CN">
+                <a:latin typeface="Comic Sans MS"/>
+                <a:ea typeface="宋体"/>
               </a:rPr>
               <a:t> </a:t>
             </a:r>
             <a:r>
-              <a:rPr lang="en-US" altLang="zh-CN">
-                <a:ea typeface="宋体" pitchFamily="2" charset="-122"/>
+              <a:rPr lang="en-US">
+                <a:latin typeface="Comic Sans MS"/>
+                <a:ea typeface="宋体"/>
               </a:rPr>
               <a:t>=</a:t>
             </a:r>
             <a:r>
-              <a:rPr lang="zh-CN" altLang="en-US">
-                <a:ea typeface="宋体" pitchFamily="2" charset="-122"/>
+              <a:rPr lang="zh-CN">
+                <a:latin typeface="Comic Sans MS"/>
+                <a:ea typeface="宋体"/>
               </a:rPr>
               <a:t> </a:t>
             </a:r>
             <a:r>
-              <a:rPr lang="en-US" altLang="zh-CN">
-                <a:ea typeface="宋体" pitchFamily="2" charset="-122"/>
+              <a:rPr lang="en-US">
+                <a:latin typeface="Comic Sans MS"/>
+                <a:ea typeface="宋体"/>
               </a:rPr>
               <a:t>103.3</a:t>
             </a:r>
-            <a:endParaRPr lang="zh-CN" altLang="en-US">
-              <a:ea typeface="宋体" pitchFamily="2" charset="-122"/>
-            </a:endParaRPr>
-          </a:p>
-          <a:p>
-            <a:pPr/>
-            <a:endParaRPr lang="zh-CN" altLang="en-US">
-              <a:ea typeface="宋体" pitchFamily="2" charset="-122"/>
+            <a:endParaRPr lang="zh-CN">
+              <a:latin typeface="Comic Sans MS"/>
+              <a:ea typeface="宋体"/>
+            </a:endParaRPr>
+          </a:p>
+          <a:p>
+            <a:pPr>
+              <a:buChar char="•"/>
+            </a:pPr>
+            <a:endParaRPr lang="zh-CN">
+              <a:latin typeface="Comic Sans MS"/>
+              <a:ea typeface="宋体"/>
+              <a:cs typeface="+mn-cs"/>
             </a:endParaRPr>
           </a:p>
         </p:txBody>
